--- a/docs/assets/deck/CoPartner-進度全景.pptx
+++ b/docs/assets/deck/CoPartner-進度全景.pptx
@@ -521,8 +521,8 @@
           <a:p>
             <a:r>
               <a:rPr lang="en-US" dirty="0"/>
-              <a:t>今天講一個我做了幾個月的 side project。它不是聊天機器人——它是一個看著你工作的助理。你不用跟它解釋你在幹嘛，因為它一直在旁邊看。而且從三週前開始，它會真的動手。
-全場只要記得這三個數字：91% 完成度、18% OCR 吞吐、595 個測試。</a:t>
+              <a:t>今天講一個我做了幾個月的 side project。它不是聊天機器人——它是一個看著你工作的助理。你不用跟它解釋你在幹嘛，因為它一直在旁邊看。而且它已經會真的動手——執行命令與操作 UI 都已經在真機上驗過。
+全場只要記得這三個數字：94% 完成度、18% OCR 吞吐、595 個測試。</a:t>
             </a:r>
             <a:endParaRPr lang="en-US" dirty="0"/>
           </a:p>
@@ -611,7 +611,7 @@
             <a:r>
               <a:rPr lang="en-US" dirty="0"/>
               <a:t>這不是巧思，是被逼出來的。但逼出來的結果是——每一個平台依賴都變成一個明確的注入點，我永遠知道「哪裡還沒接真的」。
-91% 的工作是在沒有真機的情況下被驗證過的。</a:t>
+94% 的工作是在沒有真機的情況下被驗證過的。</a:t>
             </a:r>
             <a:endParaRPr lang="en-US" dirty="0"/>
           </a:p>
@@ -1319,7 +1319,8 @@
           <a:p>
             <a:r>
               <a:rPr lang="en-US" dirty="0"/>
-              <a:t>左邊四項都在真機上驗過了。右邊四項裡，第一項其實只差你按一次按鈕——開關 8/20 就翻開了，只是驗收回報還沒補。</a:t>
+              <a:t>左邊六項都在真機上驗過了——執行端整條鏈是通的。
+右邊剩的其實只有一件事的兩面：提議的來源還是本地合成的，接上真雲端之後才輪得到驗「Claude 有沒有正確續寫」。</a:t>
             </a:r>
             <a:endParaRPr lang="en-US" dirty="0"/>
           </a:p>
@@ -2116,7 +2117,7 @@
           <a:p>
             <a:r>
               <a:rPr lang="en-US" dirty="0"/>
-              <a:t>91% 這個數字要小心解讀。剩下的六項全部是要真機、真權限、真 GPU 才能驗的東西——沒有任何一行「CI 能驗但還沒寫」的邏輯欠著。
+              <a:t>94% 這個數字要小心解讀。剩下的四項全部是要真機、真權限、真 GPU 才能驗的東西——沒有任何一行「CI 能驗但還沒寫」的邏輯欠著。
 綠色是完成，琥珀色是進行中，空格是待驗收。</a:t>
             </a:r>
             <a:endParaRPr lang="en-US" dirty="0"/>
@@ -3210,7 +3211,7 @@
                 <a:ea typeface="Calibri" pitchFamily="34" charset="-122"/>
                 <a:cs typeface="Calibri" pitchFamily="34" charset="-120"/>
               </a:rPr>
-              <a:t>91%</a:t>
+              <a:t>94%</a:t>
             </a:r>
             <a:endParaRPr lang="en-US" sz="4000" dirty="0"/>
           </a:p>
@@ -3444,7 +3445,7 @@
                 <a:ea typeface="Courier New" pitchFamily="34" charset="-122"/>
                 <a:cs typeface="Courier New" pitchFamily="34" charset="-120"/>
               </a:rPr>
-              <a:t>main @ 14e4989  ·  2026-09-03  ·  42 個 PR 已合併</a:t>
+              <a:t>main @ 3f14bb6  ·  2026-09-03  ·  50 個 PR 已合併</a:t>
             </a:r>
             <a:endParaRPr lang="en-US" sz="1000" dirty="0"/>
           </a:p>
@@ -5013,7 +5014,7 @@
                 <a:ea typeface="Calibri" pitchFamily="34" charset="-122"/>
                 <a:cs typeface="Calibri" pitchFamily="34" charset="-120"/>
               </a:rPr>
-              <a:t>2026-08-20  ·  STEP 53.5</a:t>
+              <a:t>2026-08-20  ·  2026-09-03  ·  STEP 53.5 / 53.6-C</a:t>
             </a:r>
             <a:endParaRPr lang="en-US" sz="1100" dirty="0"/>
           </a:p>
@@ -5052,7 +5053,7 @@
                 <a:ea typeface="Cambria" pitchFamily="34" charset="-122"/>
                 <a:cs typeface="Cambria" pitchFamily="34" charset="-120"/>
               </a:rPr>
-              <a:t>翻開執行開關那天</a:t>
+              <a:t>兩次「第一次」</a:t>
             </a:r>
             <a:endParaRPr lang="en-US" sz="3300" dirty="0"/>
           </a:p>
@@ -9595,7 +9596,7 @@
                 <a:ea typeface="Calibri" pitchFamily="34" charset="-122"/>
                 <a:cs typeface="Calibri" pitchFamily="34" charset="-120"/>
               </a:rPr>
-              <a:t>    →    7 項全綠  ·  0 失敗  ·  </a:t>
+              <a:t>    →    8 項全綠  ·  0 失敗  ·  </a:t>
             </a:r>
             <a:pPr indent="0" marL="0">
               <a:buNone/>
@@ -10727,7 +10728,7 @@
         </p:nvSpPr>
         <p:spPr>
           <a:xfrm>
-            <a:off x="841248" y="2560320"/>
+            <a:off x="841248" y="2487168"/>
             <a:ext cx="685800" cy="256032"/>
           </a:xfrm>
           <a:prstGeom prst="rect">
@@ -10766,7 +10767,7 @@
         </p:nvSpPr>
         <p:spPr>
           <a:xfrm>
-            <a:off x="1572768" y="2542032"/>
+            <a:off x="1572768" y="2468880"/>
             <a:ext cx="4020160" cy="603504"/>
           </a:xfrm>
           <a:prstGeom prst="rect">
@@ -10808,7 +10809,7 @@
         </p:nvSpPr>
         <p:spPr>
           <a:xfrm>
-            <a:off x="841248" y="3337560"/>
+            <a:off x="841248" y="3017520"/>
             <a:ext cx="685800" cy="256032"/>
           </a:xfrm>
           <a:prstGeom prst="rect">
@@ -10847,7 +10848,7 @@
         </p:nvSpPr>
         <p:spPr>
           <a:xfrm>
-            <a:off x="1572768" y="3319272"/>
+            <a:off x="1572768" y="2999232"/>
             <a:ext cx="4020160" cy="603504"/>
           </a:xfrm>
           <a:prstGeom prst="rect">
@@ -10889,7 +10890,7 @@
         </p:nvSpPr>
         <p:spPr>
           <a:xfrm>
-            <a:off x="841248" y="4114800"/>
+            <a:off x="841248" y="3547872"/>
             <a:ext cx="685800" cy="256032"/>
           </a:xfrm>
           <a:prstGeom prst="rect">
@@ -10928,7 +10929,7 @@
         </p:nvSpPr>
         <p:spPr>
           <a:xfrm>
-            <a:off x="1572768" y="4096512"/>
+            <a:off x="1572768" y="3529584"/>
             <a:ext cx="4020160" cy="603504"/>
           </a:xfrm>
           <a:prstGeom prst="rect">
@@ -10956,7 +10957,7 @@
                 <a:ea typeface="Calibri" pitchFamily="34" charset="-122"/>
                 <a:cs typeface="Calibri" pitchFamily="34" charset="-120"/>
               </a:rPr>
-              <a:t>sandbox-exec profile — 成對驗證 7 項全綠</a:t>
+              <a:t>sandbox-exec profile — 成對驗證 8 項全綠</a:t>
             </a:r>
             <a:endParaRPr lang="en-US" sz="1250" dirty="0"/>
           </a:p>
@@ -10970,7 +10971,7 @@
         </p:nvSpPr>
         <p:spPr>
           <a:xfrm>
-            <a:off x="841248" y="4892040"/>
+            <a:off x="841248" y="4078224"/>
             <a:ext cx="685800" cy="256032"/>
           </a:xfrm>
           <a:prstGeom prst="rect">
@@ -10995,7 +10996,7 @@
                 <a:ea typeface="Courier New" pitchFamily="34" charset="-122"/>
                 <a:cs typeface="Courier New" pitchFamily="34" charset="-120"/>
               </a:rPr>
-              <a:t>53.7</a:t>
+              <a:t>53.5</a:t>
             </a:r>
             <a:endParaRPr lang="en-US" sz="1100" dirty="0"/>
           </a:p>
@@ -11009,7 +11010,7 @@
         </p:nvSpPr>
         <p:spPr>
           <a:xfrm>
-            <a:off x="1572768" y="4873752"/>
+            <a:off x="1572768" y="4059936"/>
             <a:ext cx="4020160" cy="603504"/>
           </a:xfrm>
           <a:prstGeom prst="rect">
@@ -11037,6 +11038,168 @@
                 <a:ea typeface="Calibri" pitchFamily="34" charset="-122"/>
                 <a:cs typeface="Calibri" pitchFamily="34" charset="-120"/>
               </a:rPr>
+              <a:t>第一次真的執行命令 — stdout 帶回對得上的 UUID（8／20）</a:t>
+            </a:r>
+            <a:endParaRPr lang="en-US" sz="1250" dirty="0"/>
+          </a:p>
+        </p:txBody>
+      </p:sp>
+      <p:sp>
+        <p:nvSpPr>
+          <p:cNvPr id="14" name="Text 12"/>
+          <p:cNvSpPr txBox="1"/>
+          <p:nvPr/>
+        </p:nvSpPr>
+        <p:spPr>
+          <a:xfrm>
+            <a:off x="841248" y="4608576"/>
+            <a:ext cx="685800" cy="256032"/>
+          </a:xfrm>
+          <a:prstGeom prst="rect">
+            <a:avLst/>
+          </a:prstGeom>
+          <a:noFill/>
+          <a:ln/>
+        </p:spPr>
+        <p:txBody>
+          <a:bodyPr wrap="square" lIns="0" tIns="0" rIns="0" bIns="0" rtlCol="0" anchor="ctr"/>
+          <a:lstStyle/>
+          <a:p>
+            <a:pPr indent="0" marL="0">
+              <a:buNone/>
+            </a:pPr>
+            <a:r>
+              <a:rPr lang="en-US" sz="1100" b="1" dirty="0">
+                <a:solidFill>
+                  <a:srgbClr val="2F6B57"/>
+                </a:solidFill>
+                <a:latin typeface="Courier New" pitchFamily="34" charset="0"/>
+                <a:ea typeface="Courier New" pitchFamily="34" charset="-122"/>
+                <a:cs typeface="Courier New" pitchFamily="34" charset="-120"/>
+              </a:rPr>
+              <a:t>53.6</a:t>
+            </a:r>
+            <a:endParaRPr lang="en-US" sz="1100" dirty="0"/>
+          </a:p>
+        </p:txBody>
+      </p:sp>
+      <p:sp>
+        <p:nvSpPr>
+          <p:cNvPr id="15" name="Text 13"/>
+          <p:cNvSpPr txBox="1"/>
+          <p:nvPr/>
+        </p:nvSpPr>
+        <p:spPr>
+          <a:xfrm>
+            <a:off x="1572768" y="4590288"/>
+            <a:ext cx="4020160" cy="603504"/>
+          </a:xfrm>
+          <a:prstGeom prst="rect">
+            <a:avLst/>
+          </a:prstGeom>
+          <a:noFill/>
+          <a:ln/>
+        </p:spPr>
+        <p:txBody>
+          <a:bodyPr wrap="square" lIns="0" tIns="0" rIns="0" bIns="0" rtlCol="0" anchor="t"/>
+          <a:lstStyle/>
+          <a:p>
+            <a:pPr indent="0" marL="0">
+              <a:lnSpc>
+                <a:spcPts val="1800"/>
+              </a:lnSpc>
+              <a:buNone/>
+            </a:pPr>
+            <a:r>
+              <a:rPr lang="en-US" sz="1250" dirty="0">
+                <a:solidFill>
+                  <a:srgbClr val="3B4644"/>
+                </a:solidFill>
+                <a:latin typeface="Calibri" pitchFamily="34" charset="0"/>
+                <a:ea typeface="Calibri" pitchFamily="34" charset="-122"/>
+                <a:cs typeface="Calibri" pitchFamily="34" charset="-120"/>
+              </a:rPr>
+              <a:t>第一次真的動使用者的電腦 — HUD 確認後畫面捲動（9／3）</a:t>
+            </a:r>
+            <a:endParaRPr lang="en-US" sz="1250" dirty="0"/>
+          </a:p>
+        </p:txBody>
+      </p:sp>
+      <p:sp>
+        <p:nvSpPr>
+          <p:cNvPr id="16" name="Text 14"/>
+          <p:cNvSpPr txBox="1"/>
+          <p:nvPr/>
+        </p:nvSpPr>
+        <p:spPr>
+          <a:xfrm>
+            <a:off x="841248" y="5138928"/>
+            <a:ext cx="685800" cy="256032"/>
+          </a:xfrm>
+          <a:prstGeom prst="rect">
+            <a:avLst/>
+          </a:prstGeom>
+          <a:noFill/>
+          <a:ln/>
+        </p:spPr>
+        <p:txBody>
+          <a:bodyPr wrap="square" lIns="0" tIns="0" rIns="0" bIns="0" rtlCol="0" anchor="ctr"/>
+          <a:lstStyle/>
+          <a:p>
+            <a:pPr indent="0" marL="0">
+              <a:buNone/>
+            </a:pPr>
+            <a:r>
+              <a:rPr lang="en-US" sz="1100" b="1" dirty="0">
+                <a:solidFill>
+                  <a:srgbClr val="2F6B57"/>
+                </a:solidFill>
+                <a:latin typeface="Courier New" pitchFamily="34" charset="0"/>
+                <a:ea typeface="Courier New" pitchFamily="34" charset="-122"/>
+                <a:cs typeface="Courier New" pitchFamily="34" charset="-120"/>
+              </a:rPr>
+              <a:t>53.7</a:t>
+            </a:r>
+            <a:endParaRPr lang="en-US" sz="1100" dirty="0"/>
+          </a:p>
+        </p:txBody>
+      </p:sp>
+      <p:sp>
+        <p:nvSpPr>
+          <p:cNvPr id="17" name="Text 15"/>
+          <p:cNvSpPr txBox="1"/>
+          <p:nvPr/>
+        </p:nvSpPr>
+        <p:spPr>
+          <a:xfrm>
+            <a:off x="1572768" y="5120640"/>
+            <a:ext cx="4020160" cy="603504"/>
+          </a:xfrm>
+          <a:prstGeom prst="rect">
+            <a:avLst/>
+          </a:prstGeom>
+          <a:noFill/>
+          <a:ln/>
+        </p:spPr>
+        <p:txBody>
+          <a:bodyPr wrap="square" lIns="0" tIns="0" rIns="0" bIns="0" rtlCol="0" anchor="t"/>
+          <a:lstStyle/>
+          <a:p>
+            <a:pPr indent="0" marL="0">
+              <a:lnSpc>
+                <a:spcPts val="1800"/>
+              </a:lnSpc>
+              <a:buNone/>
+            </a:pPr>
+            <a:r>
+              <a:rPr lang="en-US" sz="1250" dirty="0">
+                <a:solidFill>
+                  <a:srgbClr val="3B4644"/>
+                </a:solidFill>
+                <a:latin typeface="Calibri" pitchFamily="34" charset="0"/>
+                <a:ea typeface="Calibri" pitchFamily="34" charset="-122"/>
+                <a:cs typeface="Calibri" pitchFamily="34" charset="-120"/>
+              </a:rPr>
               <a:t>記憶體洩漏定位並修復 — +151 → +7 MB/hr</a:t>
             </a:r>
             <a:endParaRPr lang="en-US" sz="1250" dirty="0"/>
@@ -11045,7 +11208,7 @@
       </p:sp>
       <p:sp>
         <p:nvSpPr>
-          <p:cNvPr id="14" name="Shape 12"/>
+          <p:cNvPr id="18" name="Shape 16"/>
           <p:cNvSpPr/>
           <p:nvPr/>
         </p:nvSpPr>
@@ -11072,7 +11235,7 @@
       </p:sp>
       <p:sp>
         <p:nvSpPr>
-          <p:cNvPr id="15" name="Text 13"/>
+          <p:cNvPr id="19" name="Text 17"/>
           <p:cNvSpPr txBox="1"/>
           <p:nvPr/>
         </p:nvSpPr>
@@ -11111,7 +11274,7 @@
       </p:sp>
       <p:sp>
         <p:nvSpPr>
-          <p:cNvPr id="16" name="Text 14"/>
+          <p:cNvPr id="20" name="Text 18"/>
           <p:cNvSpPr txBox="1"/>
           <p:nvPr/>
         </p:nvSpPr>
@@ -11150,7 +11313,7 @@
       </p:sp>
       <p:sp>
         <p:nvSpPr>
-          <p:cNvPr id="17" name="Text 15"/>
+          <p:cNvPr id="21" name="Text 19"/>
           <p:cNvSpPr txBox="1"/>
           <p:nvPr/>
         </p:nvSpPr>
@@ -11184,7 +11347,7 @@
                 <a:ea typeface="Calibri" pitchFamily="34" charset="-122"/>
                 <a:cs typeface="Calibri" pitchFamily="34" charset="-120"/>
               </a:rPr>
-              <a:t>第一次真執行的回報 — 開關已翻開，等 dogfood</a:t>
+              <a:t>接上真雲端 SSE 來源 — 執行端全通了，但提議還是本地合成的；目前解析鏈用假來源驗過</a:t>
             </a:r>
             <a:endParaRPr lang="en-US" sz="1250" dirty="0"/>
           </a:p>
@@ -11192,7 +11355,7 @@
       </p:sp>
       <p:sp>
         <p:nvSpPr>
-          <p:cNvPr id="18" name="Text 16"/>
+          <p:cNvPr id="22" name="Text 20"/>
           <p:cNvSpPr txBox="1"/>
           <p:nvPr/>
         </p:nvSpPr>
@@ -11231,7 +11394,7 @@
       </p:sp>
       <p:sp>
         <p:nvSpPr>
-          <p:cNvPr id="19" name="Text 17"/>
+          <p:cNvPr id="23" name="Text 21"/>
           <p:cNvSpPr txBox="1"/>
           <p:nvPr/>
         </p:nvSpPr>
@@ -11265,7 +11428,7 @@
                 <a:ea typeface="Calibri" pitchFamily="34" charset="-122"/>
                 <a:cs typeface="Calibri" pitchFamily="34" charset="-120"/>
               </a:rPr>
-              <a:t>翻開 willPerformUIActions（UI 動作，53.6-C）</a:t>
+              <a:t>對照 I1–I10 逐項勾：危險指令被攔／kill-switch 全鏈斷／越界寫入 deny／LiteLLM 預算熔斷</a:t>
             </a:r>
             <a:endParaRPr lang="en-US" sz="1250" dirty="0"/>
           </a:p>
@@ -11273,7 +11436,7 @@
       </p:sp>
       <p:sp>
         <p:nvSpPr>
-          <p:cNvPr id="20" name="Text 18"/>
+          <p:cNvPr id="24" name="Text 22"/>
           <p:cNvSpPr txBox="1"/>
           <p:nvPr/>
         </p:nvSpPr>
@@ -11312,7 +11475,7 @@
       </p:sp>
       <p:sp>
         <p:nvSpPr>
-          <p:cNvPr id="21" name="Text 19"/>
+          <p:cNvPr id="25" name="Text 23"/>
           <p:cNvSpPr txBox="1"/>
           <p:nvPr/>
         </p:nvSpPr>
@@ -11346,7 +11509,7 @@
                 <a:ea typeface="Calibri" pitchFamily="34" charset="-122"/>
                 <a:cs typeface="Calibri" pitchFamily="34" charset="-120"/>
               </a:rPr>
-              <a:t>接上真雲端 SSE 來源 — 目前解析鏈用假來源驗過</a:t>
+              <a:t>接手品質 — 留個 open loop 按熱鍵，Claude 應接續而不是貼一堆說明文字</a:t>
             </a:r>
             <a:endParaRPr lang="en-US" sz="1250" dirty="0"/>
           </a:p>
@@ -11354,88 +11517,7 @@
       </p:sp>
       <p:sp>
         <p:nvSpPr>
-          <p:cNvPr id="22" name="Text 20"/>
-          <p:cNvSpPr txBox="1"/>
-          <p:nvPr/>
-        </p:nvSpPr>
-        <p:spPr>
-          <a:xfrm>
-            <a:off x="6598768" y="4892040"/>
-            <a:ext cx="274320" cy="256032"/>
-          </a:xfrm>
-          <a:prstGeom prst="rect">
-            <a:avLst/>
-          </a:prstGeom>
-          <a:noFill/>
-          <a:ln/>
-        </p:spPr>
-        <p:txBody>
-          <a:bodyPr wrap="square" lIns="0" tIns="0" rIns="0" bIns="0" rtlCol="0" anchor="ctr"/>
-          <a:lstStyle/>
-          <a:p>
-            <a:pPr indent="0" marL="0">
-              <a:buNone/>
-            </a:pPr>
-            <a:r>
-              <a:rPr lang="en-US" sz="1200" b="1" dirty="0">
-                <a:solidFill>
-                  <a:srgbClr val="A9640B"/>
-                </a:solidFill>
-                <a:latin typeface="Calibri" pitchFamily="34" charset="0"/>
-                <a:ea typeface="Calibri" pitchFamily="34" charset="-122"/>
-                <a:cs typeface="Calibri" pitchFamily="34" charset="-120"/>
-              </a:rPr>
-              <a:t>4</a:t>
-            </a:r>
-            <a:endParaRPr lang="en-US" sz="1200" dirty="0"/>
-          </a:p>
-        </p:txBody>
-      </p:sp>
-      <p:sp>
-        <p:nvSpPr>
-          <p:cNvPr id="23" name="Text 21"/>
-          <p:cNvSpPr txBox="1"/>
-          <p:nvPr/>
-        </p:nvSpPr>
-        <p:spPr>
-          <a:xfrm>
-            <a:off x="6946240" y="4873752"/>
-            <a:ext cx="4404208" cy="731520"/>
-          </a:xfrm>
-          <a:prstGeom prst="rect">
-            <a:avLst/>
-          </a:prstGeom>
-          <a:noFill/>
-          <a:ln/>
-        </p:spPr>
-        <p:txBody>
-          <a:bodyPr wrap="square" lIns="0" tIns="0" rIns="0" bIns="0" rtlCol="0" anchor="t"/>
-          <a:lstStyle/>
-          <a:p>
-            <a:pPr indent="0" marL="0">
-              <a:lnSpc>
-                <a:spcPts val="1800"/>
-              </a:lnSpc>
-              <a:buNone/>
-            </a:pPr>
-            <a:r>
-              <a:rPr lang="en-US" sz="1250" dirty="0">
-                <a:solidFill>
-                  <a:srgbClr val="3B4644"/>
-                </a:solidFill>
-                <a:latin typeface="Calibri" pitchFamily="34" charset="0"/>
-                <a:ea typeface="Calibri" pitchFamily="34" charset="-122"/>
-                <a:cs typeface="Calibri" pitchFamily="34" charset="-120"/>
-              </a:rPr>
-              <a:t>對照 I1–I10 逐項勾：危險指令被攔／kill-switch 全鏈／越界寫入 deny／預算熔斷／接手品質</a:t>
-            </a:r>
-            <a:endParaRPr lang="en-US" sz="1250" dirty="0"/>
-          </a:p>
-        </p:txBody>
-      </p:sp>
-      <p:sp>
-        <p:nvSpPr>
-          <p:cNvPr id="24" name="Text 22"/>
+          <p:cNvPr id="26" name="Text 24"/>
           <p:cNvSpPr txBox="1"/>
           <p:nvPr/>
         </p:nvSpPr>
@@ -15621,7 +15703,7 @@
                 <a:ea typeface="Calibri" pitchFamily="34" charset="-122"/>
                 <a:cs typeface="Calibri" pitchFamily="34" charset="-120"/>
               </a:rPr>
-              <a:t>執行端已建成 · 開關已翻開</a:t>
+              <a:t>兩種執行能力都已真機驗過</a:t>
             </a:r>
             <a:endParaRPr lang="en-US" sz="1200" dirty="0"/>
           </a:p>
@@ -19229,7 +19311,7 @@
                 <a:ea typeface="Calibri" pitchFamily="34" charset="-122"/>
                 <a:cs typeface="Calibri" pitchFamily="34" charset="-120"/>
               </a:rPr>
-              <a:t>60</a:t>
+              <a:t>62</a:t>
             </a:r>
             <a:pPr indent="0" marL="0">
               <a:buNone/>
@@ -19257,7 +19339,7 @@
                 <a:ea typeface="Calibri" pitchFamily="34" charset="-122"/>
                 <a:cs typeface="Calibri" pitchFamily="34" charset="-120"/>
               </a:rPr>
-              <a:t>   91%</a:t>
+              <a:t>   94%</a:t>
             </a:r>
             <a:endParaRPr lang="en-US" sz="5200" dirty="0"/>
           </a:p>
@@ -20272,7 +20354,7 @@
                 <a:ea typeface="Calibri" pitchFamily="34" charset="-122"/>
                 <a:cs typeface="Calibri" pitchFamily="34" charset="-120"/>
               </a:rPr>
-              <a:t>進行中</a:t>
+              <a:t>執行端全通過</a:t>
             </a:r>
             <a:endParaRPr lang="en-US" sz="950" dirty="0"/>
           </a:p>
@@ -22410,7 +22492,7 @@
             </a:avLst>
           </a:prstGeom>
           <a:solidFill>
-            <a:srgbClr val="A9640B"/>
+            <a:srgbClr val="2F6B57"/>
           </a:solidFill>
           <a:ln/>
         </p:spPr>
@@ -22432,7 +22514,7 @@
             </a:avLst>
           </a:prstGeom>
           <a:solidFill>
-            <a:srgbClr val="A9640B"/>
+            <a:srgbClr val="2F6B57"/>
           </a:solidFill>
           <a:ln/>
         </p:spPr>
@@ -22470,7 +22552,7 @@
                 <a:ea typeface="Courier New" pitchFamily="34" charset="-122"/>
                 <a:cs typeface="Courier New" pitchFamily="34" charset="-120"/>
               </a:rPr>
-              <a:t>15 / 17</a:t>
+              <a:t>17 / 17</a:t>
             </a:r>
             <a:endParaRPr lang="en-US" sz="1050" dirty="0"/>
           </a:p>
@@ -22768,7 +22850,7 @@
                 <a:ea typeface="Calibri" pitchFamily="34" charset="-122"/>
                 <a:cs typeface="Calibri" pitchFamily="34" charset="-120"/>
               </a:rPr>
-              <a:t>剩下六項全部只有真 Mac 能驗：</a:t>
+              <a:t>剩下四項全部只有真 Mac 能驗：</a:t>
             </a:r>
             <a:pPr indent="0" marL="0">
               <a:buNone/>
@@ -22782,7 +22864,7 @@
                 <a:ea typeface="Calibri" pitchFamily="34" charset="-122"/>
                 <a:cs typeface="Calibri" pitchFamily="34" charset="-120"/>
               </a:rPr>
-              <a:t>23.5（延後）· 24（M1）· 36（M3）· 53.5（第一次真執行）· 53.6-C（UI 動作）· 58（M6）　—　沒有任何「CI 能驗但還沒寫」的邏輯欠著。</a:t>
+              <a:t>23.5（延後優化）· 24（M1）· 36（M3）· 58（M6）　—　沒有任何「CI 能驗但還沒寫」的邏輯欠著。</a:t>
             </a:r>
             <a:endParaRPr lang="en-US" sz="1250" dirty="0"/>
           </a:p>
